--- a/media/resources/files/4-Amal-katanytapTarsia.pptx
+++ b/media/resources/files/4-Amal-katanytapTarsia.pptx
@@ -3540,7 +3540,7 @@
                 <a:latin typeface="Arial" panose="020B0604020202020204" pitchFamily="34" charset="0"/>
                 <a:cs typeface="Arial" panose="020B0604020202020204" pitchFamily="34" charset="0"/>
               </a:rPr>
-              <a:t>Студенттер кайчылаш суроолорду жана жооптордун каталарын текшерип, анан аларды оңдоосу керек.</a:t>
+              <a:t>Окуучулар суроо менен жооптогу каталарды текшерип, оңдошот.</a:t>
             </a:r>
           </a:p>
           <a:p>
@@ -3567,7 +3567,7 @@
                 <a:latin typeface="Arial" panose="020B0604020202020204" pitchFamily="34" charset="0"/>
                 <a:cs typeface="Arial" panose="020B0604020202020204" pitchFamily="34" charset="0"/>
               </a:rPr>
-              <a:t>Студенттерге канча каталарды табышы керек экенин айтуу зарыл эмес.</a:t>
+              <a:t>Окуучуларга канча ката табарын айтуу шарт эмес.</a:t>
             </a:r>
           </a:p>
           <a:p>
